--- a/VOIS_Major_Project_PPT_Submission_Template.pptx
+++ b/VOIS_Major_Project_PPT_Submission_Template.pptx
@@ -14001,7 +14001,7 @@
               </a:defRPr>
             </a:pPr>
             <a:r>
-              <a:t>https://github.com/AswiniKumar55/-Seasonal-Agriculture-Performance-Analysis-.git</a:t>
+              <a:t>https://github.com/chourasiavinit9-dev/Seasonal_Major_project</a:t>
             </a:r>
           </a:p>
           <a:p>
